--- a/slides/Toan12/Slide_TOAN12_Bai1_T1-6.pptx
+++ b/slides/Toan12/Slide_TOAN12_Bai1_T1-6.pptx
@@ -5132,7 +5132,7 @@
                 </a:r>
                 <a:r>
                   <a:rPr lang="vi-VN"/>
-                  <a:t>y=x^3-6x^2+9x+30</a:t>
+                  <a:t>y=x^3−6x^2+9x+30</a:t>
                 </a:r>
               </a:p>
               <a:p>
@@ -5148,7 +5148,7 @@
                 </a:pPr>
                 <a:r>
                   <a:rPr lang="vi-VN"/>
-                  <a:t>y'=3x^2-12x+9=0\Leftrightarrow x=1</a:t>
+                  <a:t>y'=3x^2−12x+9=0\Leftrightarrow x=1</a:t>
                 </a:r>
                 <a:r>
                   <a:rPr sz="2400">
@@ -5818,7 +5818,7 @@
                 </a:pPr>
                 <a:r>
                   <a:rPr lang="vi-VN"/>
-                  <a:t>y=\frac{x^2-2x+9}{x-2}</a:t>
+                  <a:t>y=\frac{x^2−2x+9}{x−2}</a:t>
                 </a:r>
                 <a:r>
                   <a:rPr sz="2400">
@@ -5843,7 +5843,7 @@
                 </a:pPr>
                 <a:r>
                   <a:rPr lang="vi-VN"/>
-                  <a:t>y=\frac{x+1}{x-1}</a:t>
+                  <a:t>y=\frac{x+1}{x−1}</a:t>
                 </a:r>
                 <a:r>
                   <a:rPr sz="2400">
@@ -5856,7 +5856,7 @@
                 </a:r>
                 <a:r>
                   <a:rPr lang="vi-VN"/>
-                  <a:t>y'=\frac{-2}{(x-1)^2}&lt;0</a:t>
+                  <a:t>y'=\frac{−2}{(x−1)^2}&lt;0</a:t>
                 </a:r>
               </a:p>
             </p:txBody>
@@ -6488,7 +6488,7 @@
                 </a:r>
                 <a:r>
                   <a:rPr lang="vi-VN"/>
-                  <a:t>y=x^4-3x^2+1</a:t>
+                  <a:t>y=x^4−3x^2+1</a:t>
                 </a:r>
                 <a:r>
                   <a:rPr sz="2400">
@@ -7073,7 +7073,7 @@
                 </a:r>
                 <a:r>
                   <a:rPr lang="vi-VN"/>
-                  <a:t>y=x^4-2x^3</a:t>
+                  <a:t>y=x^4−2x^3</a:t>
                 </a:r>
                 <a:r>
                   <a:rPr sz="2400">
@@ -7571,7 +7571,7 @@
                 </a:r>
                 <a:r>
                   <a:rPr lang="vi-VN"/>
-                  <a:t>h(t)=2+24{,}5t-4{,}9t^2</a:t>
+                  <a:t>h(t)=2+24{,}5t−4{,}9t^2</a:t>
                 </a:r>
               </a:p>
               <a:p>
@@ -9345,7 +9345,7 @@
                 </a:r>
                 <a:r>
                   <a:rPr lang="vi-VN"/>
-                  <a:t>s(t)=t^3-9t^2+15t</a:t>
+                  <a:t>s(t)=t^3−9t^2+15t</a:t>
                 </a:r>
               </a:p>
               <a:p>
@@ -10615,7 +10615,7 @@
                 </a:r>
                 <a:r>
                   <a:rPr lang="vi-VN"/>
-                  <a:t>y=x^3-3x^2+2</a:t>
+                  <a:t>y=x^3−3x^2+2</a:t>
                 </a:r>
                 <a:r>
                   <a:rPr sz="2400" b="1">
@@ -11229,7 +11229,7 @@
                 </a:r>
                 <a:r>
                   <a:rPr lang="vi-VN"/>
-                  <a:t>y=x^2-4x+2</a:t>
+                  <a:t>y=x^2−4x+2</a:t>
                 </a:r>
                 <a:r>
                   <a:rPr sz="2400">
@@ -11242,7 +11242,7 @@
                 </a:r>
                 <a:r>
                   <a:rPr lang="vi-VN"/>
-                  <a:t>y'=2x-4</a:t>
+                  <a:t>y'=2x−4</a:t>
                 </a:r>
               </a:p>
             </p:txBody>
@@ -12329,7 +12329,7 @@
                 </a:r>
                 <a:r>
                   <a:rPr lang="vi-VN"/>
-                  <a:t>y=\frac{x^2-2x+5}{x-1}</a:t>
+                  <a:t>y=\frac{x^2−2x+5}{x−1}</a:t>
                 </a:r>
                 <a:r>
                   <a:rPr sz="2400" b="1">
@@ -12354,7 +12354,7 @@
                 </a:pPr>
                 <a:r>
                   <a:rPr lang="vi-VN"/>
-                  <a:t>y'=\frac{x^2-2x-3}{(x-1)^2}=0\Leftrightarrow x=-1</a:t>
+                  <a:t>y'=\frac{x^2−2x−3}{(x−1)^2}=0\Leftrightarrow x=−1</a:t>
                 </a:r>
                 <a:r>
                   <a:rPr sz="2400">
@@ -12849,7 +12849,7 @@
                 </a:r>
                 <a:r>
                   <a:rPr lang="vi-VN"/>
-                  <a:t>v(t)=s'(t)=3t^2-18t+15</a:t>
+                  <a:t>v(t)=s'(t)=3t^2−18t+15</a:t>
                 </a:r>
               </a:p>
               <a:p>
